--- a/slides/TBio_UDL_Ch1-8_OneHour.pptx
+++ b/slides/TBio_UDL_Ch1-8_OneHour.pptx
@@ -10509,31 +10509,6 @@
                 <a:latin typeface="Calibri"/>
               </a:rPr>
               <a:t>Skip the two challenges first. Stuck? Run the solution cell so later parts work.</a:t>
-            </a:r>
-          </a:p>
-          <a:p>
-            <a:pPr algn="l">
-              <a:spcAft>
-                <a:spcPts val="600"/>
-              </a:spcAft>
-            </a:pPr>
-            <a:r>
-              <a:rPr sz="1500" b="1" i="0">
-                <a:solidFill>
-                  <a:srgbClr val="008759"/>
-                </a:solidFill>
-                <a:latin typeface="Calibri"/>
-              </a:rPr>
-              <a:t>Want more? </a:t>
-            </a:r>
-            <a:r>
-              <a:rPr sz="1500" b="0" i="0">
-                <a:solidFill>
-                  <a:srgbClr val="404040"/>
-                </a:solidFill>
-                <a:latin typeface="Calibri"/>
-              </a:rPr>
-              <a:t>The repo's extended/ folder has the full version: 35 puzzles and a capstone.</a:t>
             </a:r>
           </a:p>
         </p:txBody>
